--- a/Docs/Presentation/Farol_Sprint_A_TTP_Presentation.pptx
+++ b/Docs/Presentation/Farol_Sprint_A_TTP_Presentation.pptx
@@ -1267,7 +1267,7 @@
           <a:p>
             <a:r>
               <a:rPr lang="en-US" dirty="0"/>
-              <a:t>(~75 s) Fizemos um inquérito no Google Forms entre 3 e 6 de outubro e a 30 de outubro, com 32 respostas válidas. Ficam 30 pessoas que já foram a um festival académico, a maioria à Queima do Porto. É pouco, o objetivo eram 100, e é uma amostra de conveniência, por isso os números mostram direção, não valores exatos. Três coisas: primeiro, 80 % esperou mais de meia hora para entrar, é de longe o problema mais comum. Segundo, 87 % diz que usaria a aplicação durante a noite, acima da meta de 60 %. Terceiro, a facilidade de encontrar informação teve média 2,97 em 5, mesmo no limite da meta de 3, e o resultado depende das respostas de 30 de outubro; por isso vamos confirmá-lo com um teste em condições de noite, com ruído e rede lenta. No gráfico, a planta do recinto é a funcionalidade mais escolhida, 52 %, logo seguida do botão de ajuda, 48 %; o assistente de perguntas é a última, 10 %. A barreira mais citada foi a bateria, 48 %.</a:t>
+              <a:t>(~75 s) Fizemos um inquérito no Google Forms entre 3 e 6 de outubro e a 30 de outubro, com 32 respostas válidas. Ficam 30 pessoas que já foram a um festival académico, a maioria à Queima do Porto. É pouco, o objetivo eram 100, e é uma amostra de conveniência, por isso os números mostram direção, não valores exatos. Três coisas: primeiro, 80 % esperou mais de meia hora para entrar, é de longe o problema mais comum. Segundo, 87 % diz que usaria a aplicação durante a noite, acima da meta de 60 %; aqui são 27 de 31, porque esta pergunta conta também quem ainda não foi mas tenciona ir. Terceiro, a facilidade de encontrar informação teve média 2,97 em 5, mesmo no limite da meta de 3, e o resultado depende das respostas de 30 de outubro; por isso vamos confirmá-lo com um teste em condições de noite, com ruído e rede lenta. No gráfico, a planta do recinto é a funcionalidade mais escolhida, 52 %, logo seguida do botão de ajuda, 48 %; o assistente de perguntas é a última, 10 %. A barreira mais citada foi a bateria, 48 %.</a:t>
             </a:r>
             <a:endParaRPr lang="en-US" dirty="0"/>
           </a:p>
@@ -5636,7 +5636,7 @@
                   <a:schemeClr val="accent3"/>
                 </a:solidFill>
               </a:rPr>
-              <a:t>Google Forms, 3–6 and 30 Oct 2026 · 32 valid answers, n = 30 who have been to a festival · convenience sample</a:t>
+              <a:t>Google Forms, 3–6 and 30 Oct 2026 · 32 valid answers · n = 30 (80 %, 2.97) and n = 31 (87 %) · convenience sample</a:t>
             </a:r>
             <a:endParaRPr lang="en-US" sz="1100" dirty="0"/>
           </a:p>

--- a/Docs/Presentation/Farol_Sprint_A_TTP_Presentation.pptx
+++ b/Docs/Presentation/Farol_Sprint_A_TTP_Presentation.pptx
@@ -1355,7 +1355,7 @@
           <a:p>
             <a:r>
               <a:rPr lang="en-US" dirty="0"/>
-              <a:t>(~60 s) Do inquérito tirámos cinco decisões. Duas confirmam o que já tínhamos: a planta é o centro da aplicação, e a IA fica na triagem dos pedidos de ajuda e não num chatbot para participantes, que quase ninguém escolheu. Três mudam o backlog: o estado das entradas por porta sobe de Could para Should, porque a espera é o problema mais comum; a bateria e a rede fraca passam a ser restrições de desenho, com páginas leves, e o modo de rede fraca volta a ser discutido; e no pedido de ajuda a aplicação pede a localização do telemóvel, que 71 % aceita partilhar, e quem recusar marca o sítio na planta. O pressuposto de que pedir ajuda pela app é mais rápido ainda não está validado: falta a entrevista ao voluntário de segurança.</a:t>
+              <a:t>(~60 s) Do inquérito tirámos cinco decisões. Duas confirmam o que já tínhamos: a planta é o centro da aplicação, e a IA fica na triagem dos pedidos de ajuda e não num chatbot para participantes, que quase ninguém escolheu. Três mudam o backlog: o estado das entradas por porta sobe de Could para Should, porque a espera é o problema mais comum; a bateria e a rede fraca passam a ser restrições de desenho, com páginas leves, e o modo de rede fraca volta a ser discutido; e no pedido de ajuda a aplicação vai pedir a localização do telemóvel, que 71 % aceita partilhar, com a planta como alternativa. Fazemo-lo por fases: no Sprint B o pedido usa o ponto na planta, e a localização do telemóvel entra no Sprint C, depois de sabermos colocar uma posição GPS na planta. O pressuposto de que pedir ajuda pela app é mais rápido ainda não está validado: falta a entrevista ao voluntário de segurança.</a:t>
             </a:r>
             <a:endParaRPr lang="en-US" dirty="0"/>
           </a:p>
@@ -6434,7 +6434,7 @@
                   <a:schemeClr val="tx2"/>
                 </a:solidFill>
               </a:rPr>
-              <a:t>Help: phone location first, map as fallback</a:t>
+              <a:t>Help: map now, phone location from Sprint C</a:t>
             </a:r>
             <a:endParaRPr lang="en-US" sz="1500" dirty="0"/>
           </a:p>
@@ -6528,7 +6528,7 @@
                   <a:schemeClr val="tx2"/>
                 </a:solidFill>
               </a:rPr>
-              <a:t>Decided</a:t>
+              <a:t>Phased</a:t>
             </a:r>
             <a:endParaRPr lang="en-US" sz="1100" dirty="0"/>
           </a:p>

--- a/Docs/Presentation/Farol_Sprint_A_TTP_Presentation.pptx
+++ b/Docs/Presentation/Farol_Sprint_A_TTP_Presentation.pptx
@@ -1267,7 +1267,7 @@
           <a:p>
             <a:r>
               <a:rPr lang="en-US" dirty="0"/>
-              <a:t>(~75 s) Fizemos um inquérito no Google Forms entre 3 e 6 de outubro e a 30 de outubro, com 32 respostas válidas. Ficam 30 pessoas que já foram a um festival académico, a maioria à Queima do Porto. É pouco, o objetivo eram 100, e é uma amostra de conveniência, por isso os números mostram direção, não valores exatos. Três coisas: primeiro, 80 % esperou mais de meia hora para entrar, é de longe o problema mais comum. Segundo, 87 % diz que usaria a aplicação durante a noite, acima da meta de 60 %. Terceiro, a facilidade de encontrar informação teve média 2,97 em 5, mesmo no limite da meta de 3, e o resultado depende das respostas de 30 de outubro; por isso vamos confirmá-lo com um teste em condições de noite, com ruído e rede lenta. No gráfico, a planta do recinto é a funcionalidade mais escolhida, 52 %, logo seguida do botão de ajuda, 48 %; o assistente de perguntas é a última, 10 %. A barreira mais citada foi a bateria, 48 %.</a:t>
+              <a:t>(~75 s) Fizemos um inquérito no Google Forms entre 3 e 6 de outubro e a 30 de outubro, com 32 respostas válidas. Ficam 30 pessoas que já foram a um festival académico, a maioria à Queima do Porto. É pouco, o objetivo eram 100, e é uma amostra de conveniência, por isso os números mostram direção, não valores exatos. Três coisas: primeiro, 80 % esperou mais de meia hora para entrar, é de longe o problema mais comum. Segundo, 87 % diz que usaria a aplicação durante a noite, acima da meta de 60 %; aqui são 27 de 31, porque esta pergunta conta também quem ainda não foi mas tenciona ir. Terceiro, a facilidade de encontrar informação teve média 2,97 em 5, mesmo no limite da meta de 3, e o resultado depende das respostas de 30 de outubro; por isso vamos confirmá-lo com um teste em condições de noite, com ruído e rede lenta. No gráfico, a planta do recinto é a funcionalidade mais escolhida, 52 %, logo seguida do botão de ajuda, 48 %; o assistente de perguntas é a última, 10 %. A barreira mais citada foi a bateria, 48 %.</a:t>
             </a:r>
             <a:endParaRPr lang="en-US" dirty="0"/>
           </a:p>
@@ -1355,7 +1355,7 @@
           <a:p>
             <a:r>
               <a:rPr lang="en-US" dirty="0"/>
-              <a:t>(~60 s) Do inquérito tirámos cinco decisões. Duas confirmam o que já tínhamos: a planta é o centro da aplicação, e a IA fica na triagem dos pedidos de ajuda e não num chatbot para participantes, que quase ninguém escolheu. Três mudam o backlog: o estado das entradas por porta sobe de Could para Should, porque a espera é o problema mais comum; a bateria e a rede fraca passam a ser restrições de desenho, com páginas leves, e o modo de rede fraca volta a ser discutido; e no pedido de ajuda a aplicação pede a localização do telemóvel, que 71 % aceita partilhar, e quem recusar marca o sítio na planta. O pressuposto de que pedir ajuda pela app é mais rápido ainda não está validado: falta a entrevista ao voluntário de segurança.</a:t>
+              <a:t>(~60 s) Do inquérito tirámos cinco decisões. Duas confirmam o que já tínhamos: a planta é o centro da aplicação, e a IA fica na triagem dos pedidos de ajuda e não num chatbot para participantes, que quase ninguém escolheu. Três mudam o backlog: o estado das entradas por porta sobe de Could para Should, porque a espera é o problema mais comum; a bateria e a rede fraca passam a ser restrições de desenho, com páginas leves, e o modo de rede fraca volta a ser discutido; e no pedido de ajuda a aplicação vai pedir a localização do telemóvel, que 71 % aceita partilhar, com a planta como alternativa. Fazemo-lo por fases: no Sprint B o pedido usa o ponto na planta, e a localização do telemóvel entra no Sprint C, depois de sabermos colocar uma posição GPS na planta. O pressuposto de que pedir ajuda pela app é mais rápido ainda não está validado: falta a entrevista ao voluntário de segurança.</a:t>
             </a:r>
             <a:endParaRPr lang="en-US" dirty="0"/>
           </a:p>
@@ -5636,7 +5636,7 @@
                   <a:schemeClr val="accent3"/>
                 </a:solidFill>
               </a:rPr>
-              <a:t>Google Forms, 3–6 and 30 Oct 2026 · 32 valid answers, n = 30 who have been to a festival · convenience sample</a:t>
+              <a:t>Google Forms, 3–6 and 30 Oct 2026 · 32 valid answers · n = 30 (80 %, 2.97) and n = 31 (87 %) · convenience sample</a:t>
             </a:r>
             <a:endParaRPr lang="en-US" sz="1100" dirty="0"/>
           </a:p>
@@ -6434,7 +6434,7 @@
                   <a:schemeClr val="tx2"/>
                 </a:solidFill>
               </a:rPr>
-              <a:t>Help: phone location first, map as fallback</a:t>
+              <a:t>Help: map now, phone location from Sprint C</a:t>
             </a:r>
             <a:endParaRPr lang="en-US" sz="1500" dirty="0"/>
           </a:p>
@@ -6528,7 +6528,7 @@
                   <a:schemeClr val="tx2"/>
                 </a:solidFill>
               </a:rPr>
-              <a:t>Decided</a:t>
+              <a:t>Phased</a:t>
             </a:r>
             <a:endParaRPr lang="en-US" sz="1100" dirty="0"/>
           </a:p>
